--- a/public/fun/pack/pptx/talkpro/발표템플릿프리미엄_21_사업제안_스카이펄.pptx
+++ b/public/fun/pack/pptx/talkpro/발표템플릿프리미엄_21_사업제안_스카이펄.pptx
@@ -115,12 +115,12 @@
   <p:extLst>
     <p:ext uri="{521415D9-36F7-43E2-AB2F-B90AF26B5E84}">
       <p14:sectionLst xmlns:p14="http://schemas.microsoft.com/office/powerpoint/2010/main">
-        <p14:section name="시작" id="{FCC2A82B-ECC8-4CB9-9F90-97F16D7C3EE5}">
+        <p14:section name="시작" id="{853E3955-8D58-4A99-AC42-A2F9FB2E75DC}">
           <p14:sldIdLst>
             <p14:sldId id="256"/>
           </p14:sldIdLst>
         </p14:section>
-        <p14:section name="본문" id="{8AB9FE4C-0ECA-410D-A1C1-A29353AFFDAE}">
+        <p14:section name="본문" id="{B6CC3E23-3B0A-4201-8B27-F2FCB39CDF50}">
           <p14:sldIdLst>
             <p14:sldId id="257"/>
             <p14:sldId id="258"/>
@@ -131,7 +131,7 @@
             <p14:sldId id="263"/>
           </p14:sldIdLst>
         </p14:section>
-        <p14:section name="마무리" id="{FD1A3DDA-2B05-4AD3-A4D4-A229B3D168BA}">
+        <p14:section name="마무리" id="{59088B54-1613-4016-A1C5-9C19BE373697}">
           <p14:sldIdLst>
             <p14:sldId id="264"/>
           </p14:sldIdLst>
@@ -1917,7 +1917,7 @@
             </a:lvl1pPr>
           </a:lstStyle>
           <a:p>
-            <a:fld id="{B360E4E7-3EF2-4995-80C5-8DDC8AF8D185}" type="slidenum">
+            <a:fld id="{9EA12CA6-9696-43E7-8A3B-F6165942DD3B}" type="slidenum">
               <a:rPr lang="en-US"/>
               <a:t>‹#›</a:t>
             </a:fld>
@@ -2544,7 +2544,7 @@
             </a:lvl1pPr>
           </a:lstStyle>
           <a:p>
-            <a:fld id="{9D1A320B-B6C0-4DBD-B8DA-0BFBFA2ACE95}" type="slidenum">
+            <a:fld id="{F2A7E736-CBEA-4CDA-9CEA-498AB42B0298}" type="slidenum">
               <a:rPr lang="en-US"/>
               <a:t>‹#›</a:t>
             </a:fld>
@@ -3133,7 +3133,7 @@
             </a:lvl1pPr>
           </a:lstStyle>
           <a:p>
-            <a:fld id="{3720748E-12AC-4F75-9012-37A02287523F}" type="slidenum">
+            <a:fld id="{82DA232B-6410-4A49-BB0A-6BA64B199E66}" type="slidenum">
               <a:rPr lang="en-US"/>
               <a:t>‹#›</a:t>
             </a:fld>
@@ -3914,7 +3914,7 @@
           <a:p>
             <a:r>
               <a:rPr lang="ko-KR"/>
-              <a:t>휴가철 전에 결정이 필요한 안건입니다</a:t>
+              <a:t>일정 전에 결정이 필요한 안건입니다</a:t>
             </a:r>
           </a:p>
         </p:txBody>
@@ -3942,7 +3942,7 @@
           <a:p>
             <a:r>
               <a:rPr lang="ko-KR"/>
-              <a:t>0000. 00. 00</a:t>
+              <a:t>날짜 입력</a:t>
             </a:r>
           </a:p>
         </p:txBody>
@@ -4027,7 +4027,7 @@
           <a:bodyPr/>
           <a:lstStyle/>
           <a:p>
-            <a:fld id="{984AE326-4B82-4D64-ADCA-281559E3721D}" type="slidenum">
+            <a:fld id="{EEFEAE5C-CD9D-44A4-9A2D-3E2971A880ED}" type="slidenum">
               <a:rPr lang="en-US"/>
               <a:t>‹#›</a:t>
             </a:fld>
@@ -5129,7 +5129,7 @@
           <a:bodyPr/>
           <a:lstStyle/>
           <a:p>
-            <a:fld id="{28A965A1-A8A3-43DD-997B-D47DD2FD3CD7}" type="slidenum">
+            <a:fld id="{4AF1B184-B7FB-45A8-9E6F-8DB6962EC2DC}" type="slidenum">
               <a:rPr lang="en-US"/>
               <a:t>‹#›</a:t>
             </a:fld>
@@ -5217,7 +5217,7 @@
           <a:bodyPr/>
           <a:lstStyle/>
           <a:p>
-            <a:fld id="{42163EAE-CD17-4099-B227-1BE07A131EF4}" type="slidenum">
+            <a:fld id="{DEEF9222-2BDF-4FF8-9CEC-BEFEBBA3465E}" type="slidenum">
               <a:rPr lang="en-US"/>
               <a:t>‹#›</a:t>
             </a:fld>
@@ -6115,7 +6115,7 @@
           <a:bodyPr/>
           <a:lstStyle/>
           <a:p>
-            <a:fld id="{AE27A7F5-CC4F-45F4-A2E0-14D139156C7C}" type="slidenum">
+            <a:fld id="{F87BCD91-A66A-4AF2-A129-BD1E8609A3BF}" type="slidenum">
               <a:rPr lang="en-US"/>
               <a:t>‹#›</a:t>
             </a:fld>
@@ -6713,7 +6713,7 @@
           <a:bodyPr/>
           <a:lstStyle/>
           <a:p>
-            <a:fld id="{B79CCCEE-3500-4D1F-8C79-9F29D14ACB05}" type="slidenum">
+            <a:fld id="{E7FB1AA9-DCE0-43FB-BA43-CB7898035415}" type="slidenum">
               <a:rPr lang="en-US"/>
               <a:t>‹#›</a:t>
             </a:fld>
@@ -6896,7 +6896,7 @@
           <a:bodyPr/>
           <a:lstStyle/>
           <a:p>
-            <a:fld id="{BA20B9C1-0319-4603-816A-AE216FE6E592}" type="slidenum">
+            <a:fld id="{5814C582-D314-4253-B35B-F512C17C579A}" type="slidenum">
               <a:rPr lang="en-US"/>
               <a:t>‹#›</a:t>
             </a:fld>
@@ -7960,7 +7960,7 @@
           <a:bodyPr/>
           <a:lstStyle/>
           <a:p>
-            <a:fld id="{82966DAC-8ACE-448D-B012-90B38FC32875}" type="slidenum">
+            <a:fld id="{ED0622A6-ADC8-4DAB-AB8C-7F3F8FF98821}" type="slidenum">
               <a:rPr lang="en-US"/>
               <a:t>‹#›</a:t>
             </a:fld>
